--- a/m5/diapositivos/sessao-10-m5-f13.pptx
+++ b/m5/diapositivos/sessao-10-m5-f13.pptx
@@ -3222,7 +3222,35 @@
                 <a:ea typeface="Arial" pitchFamily="34" charset="-122"/>
                 <a:cs typeface="Arial" pitchFamily="34" charset="-120"/>
               </a:rPr>
-              <a:t>Eça de Queirós, Os Maias (1888), último capítulo, grafia da edição.</a:t>
+              <a:t>Eça de Queirós, </a:t>
+            </a:r>
+            <a:pPr indent="0" marL="0">
+              <a:buNone/>
+            </a:pPr>
+            <a:r>
+              <a:rPr lang="en-US" sz="1200" i="1" dirty="0">
+                <a:solidFill>
+                  <a:srgbClr val="A9A79F"/>
+                </a:solidFill>
+                <a:latin typeface="Arial" pitchFamily="34" charset="0"/>
+                <a:ea typeface="Arial" pitchFamily="34" charset="-122"/>
+                <a:cs typeface="Arial" pitchFamily="34" charset="-120"/>
+              </a:rPr>
+              <a:t>Os Maias</a:t>
+            </a:r>
+            <a:pPr indent="0" marL="0">
+              <a:buNone/>
+            </a:pPr>
+            <a:r>
+              <a:rPr lang="en-US" sz="1200" dirty="0">
+                <a:solidFill>
+                  <a:srgbClr val="A9A79F"/>
+                </a:solidFill>
+                <a:latin typeface="Arial" pitchFamily="34" charset="0"/>
+                <a:ea typeface="Arial" pitchFamily="34" charset="-122"/>
+                <a:cs typeface="Arial" pitchFamily="34" charset="-120"/>
+              </a:rPr>
+              <a:t> (1888), último capítulo, grafia da edição.</a:t>
             </a:r>
             <a:endParaRPr lang="en-US" sz="1200" dirty="0"/>
           </a:p>
@@ -3501,11 +3529,8 @@
                 <a:ea typeface="Georgia" pitchFamily="34" charset="-122"/>
                 <a:cs typeface="Georgia" pitchFamily="34" charset="-120"/>
               </a:rPr>
-              <a:t>Carlos considerou Ega com espanto. Para que? Para arrastar os passos tristes desde o Gremio até á Casa Havaneza? Não! Paris era o unico logar da terra congenere com o typo definitivo em que elle se fixára: — «o homem rico que vive bem». Passeio a cavallo no Bois; almóço no Bignon; uma volta pelo boulevard; uma hora no club com os jornaes; um bocado de florete na sala d'armas; á noite a Comédie Française ou uma soirée; Trouville no verão, alguns tiros ás lebres no inverno; e através do anno as mulheres, as corridas, certo interesse pela sciencia, o bric-à-brac, e uma pouca de blague. Nada mais inoffensivo, mais nullo, e mais agradavel.</a:t>
-            </a:r>
-            <a:endParaRPr lang="en-US" sz="2200" dirty="0"/>
-          </a:p>
-          <a:p>
+              <a:t>Carlos considerou Ega com espanto. Para que? Para arrastar os passos tristes desde o Gremio até á Casa Havaneza? Não! Paris era o unico logar da terra congenere com o typo definitivo em que elle se fixára: — «o homem rico que vive bem». Passeio a cavallo no Bois; almóço no Bignon; uma volta pelo </a:t>
+            </a:r>
             <a:pPr indent="0" marL="0">
               <a:lnSpc>
                 <a:spcPct val="125000"/>
@@ -3513,7 +3538,7 @@
               <a:buNone/>
             </a:pPr>
             <a:r>
-              <a:rPr lang="en-US" sz="2200" dirty="0">
+              <a:rPr lang="en-US" sz="2200" i="1" dirty="0">
                 <a:solidFill>
                   <a:srgbClr val="F2F0EA"/>
                 </a:solidFill>
@@ -3521,6 +3546,179 @@
                 <a:ea typeface="Georgia" pitchFamily="34" charset="-122"/>
                 <a:cs typeface="Georgia" pitchFamily="34" charset="-120"/>
               </a:rPr>
+              <a:t>boulevard</a:t>
+            </a:r>
+            <a:pPr indent="0" marL="0">
+              <a:lnSpc>
+                <a:spcPct val="125000"/>
+              </a:lnSpc>
+              <a:buNone/>
+            </a:pPr>
+            <a:r>
+              <a:rPr lang="en-US" sz="2200" dirty="0">
+                <a:solidFill>
+                  <a:srgbClr val="F2F0EA"/>
+                </a:solidFill>
+                <a:latin typeface="Georgia" pitchFamily="34" charset="0"/>
+                <a:ea typeface="Georgia" pitchFamily="34" charset="-122"/>
+                <a:cs typeface="Georgia" pitchFamily="34" charset="-120"/>
+              </a:rPr>
+              <a:t>; uma hora no club com os jornaes; um bocado de florete na sala d'armas; á noite a </a:t>
+            </a:r>
+            <a:pPr indent="0" marL="0">
+              <a:lnSpc>
+                <a:spcPct val="125000"/>
+              </a:lnSpc>
+              <a:buNone/>
+            </a:pPr>
+            <a:r>
+              <a:rPr lang="en-US" sz="2200" i="1" dirty="0">
+                <a:solidFill>
+                  <a:srgbClr val="F2F0EA"/>
+                </a:solidFill>
+                <a:latin typeface="Georgia" pitchFamily="34" charset="0"/>
+                <a:ea typeface="Georgia" pitchFamily="34" charset="-122"/>
+                <a:cs typeface="Georgia" pitchFamily="34" charset="-120"/>
+              </a:rPr>
+              <a:t>Comédie Française</a:t>
+            </a:r>
+            <a:pPr indent="0" marL="0">
+              <a:lnSpc>
+                <a:spcPct val="125000"/>
+              </a:lnSpc>
+              <a:buNone/>
+            </a:pPr>
+            <a:r>
+              <a:rPr lang="en-US" sz="2200" dirty="0">
+                <a:solidFill>
+                  <a:srgbClr val="F2F0EA"/>
+                </a:solidFill>
+                <a:latin typeface="Georgia" pitchFamily="34" charset="0"/>
+                <a:ea typeface="Georgia" pitchFamily="34" charset="-122"/>
+                <a:cs typeface="Georgia" pitchFamily="34" charset="-120"/>
+              </a:rPr>
+              <a:t> ou uma </a:t>
+            </a:r>
+            <a:pPr indent="0" marL="0">
+              <a:lnSpc>
+                <a:spcPct val="125000"/>
+              </a:lnSpc>
+              <a:buNone/>
+            </a:pPr>
+            <a:r>
+              <a:rPr lang="en-US" sz="2200" i="1" dirty="0">
+                <a:solidFill>
+                  <a:srgbClr val="F2F0EA"/>
+                </a:solidFill>
+                <a:latin typeface="Georgia" pitchFamily="34" charset="0"/>
+                <a:ea typeface="Georgia" pitchFamily="34" charset="-122"/>
+                <a:cs typeface="Georgia" pitchFamily="34" charset="-120"/>
+              </a:rPr>
+              <a:t>soirée</a:t>
+            </a:r>
+            <a:pPr indent="0" marL="0">
+              <a:lnSpc>
+                <a:spcPct val="125000"/>
+              </a:lnSpc>
+              <a:buNone/>
+            </a:pPr>
+            <a:r>
+              <a:rPr lang="en-US" sz="2200" dirty="0">
+                <a:solidFill>
+                  <a:srgbClr val="F2F0EA"/>
+                </a:solidFill>
+                <a:latin typeface="Georgia" pitchFamily="34" charset="0"/>
+                <a:ea typeface="Georgia" pitchFamily="34" charset="-122"/>
+                <a:cs typeface="Georgia" pitchFamily="34" charset="-120"/>
+              </a:rPr>
+              <a:t>; Trouville no verão, alguns tiros ás lebres no inverno; e através do anno as mulheres, as corridas, certo interesse pela sciencia, o </a:t>
+            </a:r>
+            <a:pPr indent="0" marL="0">
+              <a:lnSpc>
+                <a:spcPct val="125000"/>
+              </a:lnSpc>
+              <a:buNone/>
+            </a:pPr>
+            <a:r>
+              <a:rPr lang="en-US" sz="2200" i="1" dirty="0">
+                <a:solidFill>
+                  <a:srgbClr val="F2F0EA"/>
+                </a:solidFill>
+                <a:latin typeface="Georgia" pitchFamily="34" charset="0"/>
+                <a:ea typeface="Georgia" pitchFamily="34" charset="-122"/>
+                <a:cs typeface="Georgia" pitchFamily="34" charset="-120"/>
+              </a:rPr>
+              <a:t>bric-à-brac</a:t>
+            </a:r>
+            <a:pPr indent="0" marL="0">
+              <a:lnSpc>
+                <a:spcPct val="125000"/>
+              </a:lnSpc>
+              <a:buNone/>
+            </a:pPr>
+            <a:r>
+              <a:rPr lang="en-US" sz="2200" dirty="0">
+                <a:solidFill>
+                  <a:srgbClr val="F2F0EA"/>
+                </a:solidFill>
+                <a:latin typeface="Georgia" pitchFamily="34" charset="0"/>
+                <a:ea typeface="Georgia" pitchFamily="34" charset="-122"/>
+                <a:cs typeface="Georgia" pitchFamily="34" charset="-120"/>
+              </a:rPr>
+              <a:t>, e uma pouca de </a:t>
+            </a:r>
+            <a:pPr indent="0" marL="0">
+              <a:lnSpc>
+                <a:spcPct val="125000"/>
+              </a:lnSpc>
+              <a:buNone/>
+            </a:pPr>
+            <a:r>
+              <a:rPr lang="en-US" sz="2200" i="1" dirty="0">
+                <a:solidFill>
+                  <a:srgbClr val="F2F0EA"/>
+                </a:solidFill>
+                <a:latin typeface="Georgia" pitchFamily="34" charset="0"/>
+                <a:ea typeface="Georgia" pitchFamily="34" charset="-122"/>
+                <a:cs typeface="Georgia" pitchFamily="34" charset="-120"/>
+              </a:rPr>
+              <a:t>blague</a:t>
+            </a:r>
+            <a:pPr indent="0" marL="0">
+              <a:lnSpc>
+                <a:spcPct val="125000"/>
+              </a:lnSpc>
+              <a:buNone/>
+            </a:pPr>
+            <a:r>
+              <a:rPr lang="en-US" sz="2200" dirty="0">
+                <a:solidFill>
+                  <a:srgbClr val="F2F0EA"/>
+                </a:solidFill>
+                <a:latin typeface="Georgia" pitchFamily="34" charset="0"/>
+                <a:ea typeface="Georgia" pitchFamily="34" charset="-122"/>
+                <a:cs typeface="Georgia" pitchFamily="34" charset="-120"/>
+              </a:rPr>
+              <a:t>. Nada mais inoffensivo, mais nullo, e mais agradavel.</a:t>
+            </a:r>
+            <a:endParaRPr lang="en-US" sz="2200" dirty="0"/>
+          </a:p>
+          <a:p>
+            <a:pPr indent="0" marL="0">
+              <a:lnSpc>
+                <a:spcPct val="125000"/>
+              </a:lnSpc>
+              <a:buNone/>
+            </a:pPr>
+            <a:r>
+              <a:rPr lang="en-US" sz="2200" dirty="0">
+                <a:solidFill>
+                  <a:srgbClr val="F2F0EA"/>
+                </a:solidFill>
+                <a:latin typeface="Georgia" pitchFamily="34" charset="0"/>
+                <a:ea typeface="Georgia" pitchFamily="34" charset="-122"/>
+                <a:cs typeface="Georgia" pitchFamily="34" charset="-120"/>
+              </a:rPr>
               <a:t>[…]</a:t>
             </a:r>
             <a:endParaRPr lang="en-US" sz="2200" dirty="0"/>
@@ -3562,7 +3760,35 @@
                 <a:ea typeface="Arial" pitchFamily="34" charset="-122"/>
                 <a:cs typeface="Arial" pitchFamily="34" charset="-120"/>
               </a:rPr>
-              <a:t>Eça de Queirós, Os Maias (1888), último capítulo, grafia da edição.</a:t>
+              <a:t>Eça de Queirós, </a:t>
+            </a:r>
+            <a:pPr indent="0" marL="0">
+              <a:buNone/>
+            </a:pPr>
+            <a:r>
+              <a:rPr lang="en-US" sz="1200" i="1" dirty="0">
+                <a:solidFill>
+                  <a:srgbClr val="A9A79F"/>
+                </a:solidFill>
+                <a:latin typeface="Arial" pitchFamily="34" charset="0"/>
+                <a:ea typeface="Arial" pitchFamily="34" charset="-122"/>
+                <a:cs typeface="Arial" pitchFamily="34" charset="-120"/>
+              </a:rPr>
+              <a:t>Os Maias</a:t>
+            </a:r>
+            <a:pPr indent="0" marL="0">
+              <a:buNone/>
+            </a:pPr>
+            <a:r>
+              <a:rPr lang="en-US" sz="1200" dirty="0">
+                <a:solidFill>
+                  <a:srgbClr val="A9A79F"/>
+                </a:solidFill>
+                <a:latin typeface="Arial" pitchFamily="34" charset="0"/>
+                <a:ea typeface="Arial" pitchFamily="34" charset="-122"/>
+                <a:cs typeface="Arial" pitchFamily="34" charset="-120"/>
+              </a:rPr>
+              <a:t> (1888), último capítulo, grafia da edição.</a:t>
             </a:r>
             <a:endParaRPr lang="en-US" sz="1200" dirty="0"/>
           </a:p>
@@ -3969,7 +4195,41 @@
                 <a:ea typeface="Arial" pitchFamily="34" charset="-122"/>
                 <a:cs typeface="Arial" pitchFamily="34" charset="-120"/>
               </a:rPr>
-              <a:t>No último capítulo de Os Maias, dez anos depois, Carlos e Ega fazem contas à vida no Ramalhete e Ega conclui: «Falhámos a vida, menino!»</a:t>
+              <a:t>No último capítulo de </a:t>
+            </a:r>
+            <a:pPr indent="0" marL="0">
+              <a:lnSpc>
+                <a:spcPct val="105000"/>
+              </a:lnSpc>
+              <a:buNone/>
+            </a:pPr>
+            <a:r>
+              <a:rPr lang="en-US" sz="2200" i="1" dirty="0">
+                <a:solidFill>
+                  <a:srgbClr val="F2F0EA"/>
+                </a:solidFill>
+                <a:latin typeface="Arial" pitchFamily="34" charset="0"/>
+                <a:ea typeface="Arial" pitchFamily="34" charset="-122"/>
+                <a:cs typeface="Arial" pitchFamily="34" charset="-120"/>
+              </a:rPr>
+              <a:t>Os Maias</a:t>
+            </a:r>
+            <a:pPr indent="0" marL="0">
+              <a:lnSpc>
+                <a:spcPct val="105000"/>
+              </a:lnSpc>
+              <a:buNone/>
+            </a:pPr>
+            <a:r>
+              <a:rPr lang="en-US" sz="2200" dirty="0">
+                <a:solidFill>
+                  <a:srgbClr val="F2F0EA"/>
+                </a:solidFill>
+                <a:latin typeface="Arial" pitchFamily="34" charset="0"/>
+                <a:ea typeface="Arial" pitchFamily="34" charset="-122"/>
+                <a:cs typeface="Arial" pitchFamily="34" charset="-120"/>
+              </a:rPr>
+              <a:t>, dez anos depois, Carlos e Ega fazem contas à vida no Ramalhete e Ega conclui: «Falhámos a vida, menino!»</a:t>
             </a:r>
             <a:endParaRPr lang="en-US" sz="2200" dirty="0"/>
           </a:p>
@@ -4494,13 +4754,10 @@
               <a:lnSpc>
                 <a:spcPct val="120000"/>
               </a:lnSpc>
-              <a:spcAft>
-                <a:spcPts val="1000"/>
-              </a:spcAft>
-              <a:buNone/>
-            </a:pPr>
-            <a:r>
-              <a:rPr lang="en-US" sz="2300" dirty="0">
+              <a:buNone/>
+            </a:pPr>
+            <a:r>
+              <a:rPr lang="en-US" sz="2300" b="1" dirty="0">
                 <a:solidFill>
                   <a:srgbClr val="F2F0EA"/>
                 </a:solidFill>
@@ -4508,18 +4765,12 @@
                 <a:ea typeface="Georgia" pitchFamily="34" charset="-122"/>
                 <a:cs typeface="Georgia" pitchFamily="34" charset="-120"/>
               </a:rPr>
-              <a:t>Tese: a tua posição, numa frase.</a:t>
-            </a:r>
-            <a:endParaRPr lang="en-US" sz="2300" dirty="0"/>
-          </a:p>
-          <a:p>
+              <a:t>Tese</a:t>
+            </a:r>
             <a:pPr indent="0" marL="0">
               <a:lnSpc>
                 <a:spcPct val="120000"/>
               </a:lnSpc>
-              <a:spcAft>
-                <a:spcPts val="1000"/>
-              </a:spcAft>
               <a:buNone/>
             </a:pPr>
             <a:r>
@@ -4531,22 +4782,16 @@
                 <a:ea typeface="Georgia" pitchFamily="34" charset="-122"/>
                 <a:cs typeface="Georgia" pitchFamily="34" charset="-120"/>
               </a:rPr>
-              <a:t>Argumento: uma razão que a prova, com um exemplo.</a:t>
-            </a:r>
-            <a:endParaRPr lang="en-US" sz="2300" dirty="0"/>
-          </a:p>
-          <a:p>
+              <a:t>: a tua posição, numa frase. </a:t>
+            </a:r>
             <a:pPr indent="0" marL="0">
               <a:lnSpc>
                 <a:spcPct val="120000"/>
               </a:lnSpc>
-              <a:spcAft>
-                <a:spcPts val="1000"/>
-              </a:spcAft>
-              <a:buNone/>
-            </a:pPr>
-            <a:r>
-              <a:rPr lang="en-US" sz="2300" dirty="0">
+              <a:buNone/>
+            </a:pPr>
+            <a:r>
+              <a:rPr lang="en-US" sz="2300" b="1" dirty="0">
                 <a:solidFill>
                   <a:srgbClr val="F2F0EA"/>
                 </a:solidFill>
@@ -4554,18 +4799,12 @@
                 <a:ea typeface="Georgia" pitchFamily="34" charset="-122"/>
                 <a:cs typeface="Georgia" pitchFamily="34" charset="-120"/>
               </a:rPr>
-              <a:t>Contra-argumento: o que dirá quem discorda; refutação: a tua resposta.</a:t>
-            </a:r>
-            <a:endParaRPr lang="en-US" sz="2300" dirty="0"/>
-          </a:p>
-          <a:p>
+              <a:t>Argumento</a:t>
+            </a:r>
             <a:pPr indent="0" marL="0">
               <a:lnSpc>
                 <a:spcPct val="120000"/>
               </a:lnSpc>
-              <a:spcAft>
-                <a:spcPts val="1000"/>
-              </a:spcAft>
               <a:buNone/>
             </a:pPr>
             <a:r>
@@ -4577,7 +4816,109 @@
                 <a:ea typeface="Georgia" pitchFamily="34" charset="-122"/>
                 <a:cs typeface="Georgia" pitchFamily="34" charset="-120"/>
               </a:rPr>
-              <a:t>Modalização: as palavras que mostram o grau de certeza («talvez», «sem dúvida», «parece-me»). Para a crítica social, junta a este excerto o jantar do Hotel Central: uma elite que sabe que o país vai falir e muda de assunto.</a:t>
+              <a:t>: uma razão que a prova, com um exemplo. </a:t>
+            </a:r>
+            <a:pPr indent="0" marL="0">
+              <a:lnSpc>
+                <a:spcPct val="120000"/>
+              </a:lnSpc>
+              <a:buNone/>
+            </a:pPr>
+            <a:r>
+              <a:rPr lang="en-US" sz="2300" b="1" dirty="0">
+                <a:solidFill>
+                  <a:srgbClr val="F2F0EA"/>
+                </a:solidFill>
+                <a:latin typeface="Georgia" pitchFamily="34" charset="0"/>
+                <a:ea typeface="Georgia" pitchFamily="34" charset="-122"/>
+                <a:cs typeface="Georgia" pitchFamily="34" charset="-120"/>
+              </a:rPr>
+              <a:t>Contra-argumento</a:t>
+            </a:r>
+            <a:pPr indent="0" marL="0">
+              <a:lnSpc>
+                <a:spcPct val="120000"/>
+              </a:lnSpc>
+              <a:buNone/>
+            </a:pPr>
+            <a:r>
+              <a:rPr lang="en-US" sz="2300" dirty="0">
+                <a:solidFill>
+                  <a:srgbClr val="F2F0EA"/>
+                </a:solidFill>
+                <a:latin typeface="Georgia" pitchFamily="34" charset="0"/>
+                <a:ea typeface="Georgia" pitchFamily="34" charset="-122"/>
+                <a:cs typeface="Georgia" pitchFamily="34" charset="-120"/>
+              </a:rPr>
+              <a:t>: o que dirá quem discorda; </a:t>
+            </a:r>
+            <a:pPr indent="0" marL="0">
+              <a:lnSpc>
+                <a:spcPct val="120000"/>
+              </a:lnSpc>
+              <a:buNone/>
+            </a:pPr>
+            <a:r>
+              <a:rPr lang="en-US" sz="2300" b="1" dirty="0">
+                <a:solidFill>
+                  <a:srgbClr val="F2F0EA"/>
+                </a:solidFill>
+                <a:latin typeface="Georgia" pitchFamily="34" charset="0"/>
+                <a:ea typeface="Georgia" pitchFamily="34" charset="-122"/>
+                <a:cs typeface="Georgia" pitchFamily="34" charset="-120"/>
+              </a:rPr>
+              <a:t>refutação</a:t>
+            </a:r>
+            <a:pPr indent="0" marL="0">
+              <a:lnSpc>
+                <a:spcPct val="120000"/>
+              </a:lnSpc>
+              <a:buNone/>
+            </a:pPr>
+            <a:r>
+              <a:rPr lang="en-US" sz="2300" dirty="0">
+                <a:solidFill>
+                  <a:srgbClr val="F2F0EA"/>
+                </a:solidFill>
+                <a:latin typeface="Georgia" pitchFamily="34" charset="0"/>
+                <a:ea typeface="Georgia" pitchFamily="34" charset="-122"/>
+                <a:cs typeface="Georgia" pitchFamily="34" charset="-120"/>
+              </a:rPr>
+              <a:t>: a tua resposta. </a:t>
+            </a:r>
+            <a:pPr indent="0" marL="0">
+              <a:lnSpc>
+                <a:spcPct val="120000"/>
+              </a:lnSpc>
+              <a:buNone/>
+            </a:pPr>
+            <a:r>
+              <a:rPr lang="en-US" sz="2300" b="1" dirty="0">
+                <a:solidFill>
+                  <a:srgbClr val="F2F0EA"/>
+                </a:solidFill>
+                <a:latin typeface="Georgia" pitchFamily="34" charset="0"/>
+                <a:ea typeface="Georgia" pitchFamily="34" charset="-122"/>
+                <a:cs typeface="Georgia" pitchFamily="34" charset="-120"/>
+              </a:rPr>
+              <a:t>Modalização</a:t>
+            </a:r>
+            <a:pPr indent="0" marL="0">
+              <a:lnSpc>
+                <a:spcPct val="120000"/>
+              </a:lnSpc>
+              <a:buNone/>
+            </a:pPr>
+            <a:r>
+              <a:rPr lang="en-US" sz="2300" dirty="0">
+                <a:solidFill>
+                  <a:srgbClr val="F2F0EA"/>
+                </a:solidFill>
+                <a:latin typeface="Georgia" pitchFamily="34" charset="0"/>
+                <a:ea typeface="Georgia" pitchFamily="34" charset="-122"/>
+                <a:cs typeface="Georgia" pitchFamily="34" charset="-120"/>
+              </a:rPr>
+              <a:t>: as palavras que mostram o grau de certeza («talvez», «sem dúvida», «parece-me»). Para a crítica social, junta a este excerto o jantar do Hotel Central: uma elite que sabe que o país vai falir e muda de assunto.</a:t>
             </a:r>
             <a:endParaRPr lang="en-US" sz="2300" dirty="0"/>
           </a:p>
@@ -4897,7 +5238,75 @@
                 <a:ea typeface="Georgia" pitchFamily="34" charset="-122"/>
                 <a:cs typeface="Georgia" pitchFamily="34" charset="-120"/>
               </a:rPr>
-              <a:t>Escreve um texto de opinião (200–300 palavras) a partir deste excerto: a crítica de Eça à sociedade continua atual? Estrutura: tese; dois argumentos com exemplos (um do romance, um de hoje, sem nomes de pessoas); contra-argumento e refutação; conclusão.</a:t>
+              <a:t>Escreve um </a:t>
+            </a:r>
+            <a:pPr indent="0" marL="0">
+              <a:lnSpc>
+                <a:spcPct val="120000"/>
+              </a:lnSpc>
+              <a:buNone/>
+            </a:pPr>
+            <a:r>
+              <a:rPr lang="en-US" sz="2300" b="1" dirty="0">
+                <a:solidFill>
+                  <a:srgbClr val="F2F0EA"/>
+                </a:solidFill>
+                <a:latin typeface="Georgia" pitchFamily="34" charset="0"/>
+                <a:ea typeface="Georgia" pitchFamily="34" charset="-122"/>
+                <a:cs typeface="Georgia" pitchFamily="34" charset="-120"/>
+              </a:rPr>
+              <a:t>texto de opinião</a:t>
+            </a:r>
+            <a:pPr indent="0" marL="0">
+              <a:lnSpc>
+                <a:spcPct val="120000"/>
+              </a:lnSpc>
+              <a:buNone/>
+            </a:pPr>
+            <a:r>
+              <a:rPr lang="en-US" sz="2300" dirty="0">
+                <a:solidFill>
+                  <a:srgbClr val="F2F0EA"/>
+                </a:solidFill>
+                <a:latin typeface="Georgia" pitchFamily="34" charset="0"/>
+                <a:ea typeface="Georgia" pitchFamily="34" charset="-122"/>
+                <a:cs typeface="Georgia" pitchFamily="34" charset="-120"/>
+              </a:rPr>
+              <a:t> (200–300 palavras) a partir deste excerto: </a:t>
+            </a:r>
+            <a:pPr indent="0" marL="0">
+              <a:lnSpc>
+                <a:spcPct val="120000"/>
+              </a:lnSpc>
+              <a:buNone/>
+            </a:pPr>
+            <a:r>
+              <a:rPr lang="en-US" sz="2300" b="1" dirty="0">
+                <a:solidFill>
+                  <a:srgbClr val="F2F0EA"/>
+                </a:solidFill>
+                <a:latin typeface="Georgia" pitchFamily="34" charset="0"/>
+                <a:ea typeface="Georgia" pitchFamily="34" charset="-122"/>
+                <a:cs typeface="Georgia" pitchFamily="34" charset="-120"/>
+              </a:rPr>
+              <a:t>a crítica de Eça à sociedade continua atual?</a:t>
+            </a:r>
+            <a:pPr indent="0" marL="0">
+              <a:lnSpc>
+                <a:spcPct val="120000"/>
+              </a:lnSpc>
+              <a:buNone/>
+            </a:pPr>
+            <a:r>
+              <a:rPr lang="en-US" sz="2300" dirty="0">
+                <a:solidFill>
+                  <a:srgbClr val="F2F0EA"/>
+                </a:solidFill>
+                <a:latin typeface="Georgia" pitchFamily="34" charset="0"/>
+                <a:ea typeface="Georgia" pitchFamily="34" charset="-122"/>
+                <a:cs typeface="Georgia" pitchFamily="34" charset="-120"/>
+              </a:rPr>
+              <a:t> Estrutura: tese; dois argumentos com exemplos (um do romance, um de hoje, sem nomes de pessoas); contra-argumento e refutação; conclusão.</a:t>
             </a:r>
             <a:endParaRPr lang="en-US" sz="2300" dirty="0"/>
           </a:p>
